--- a/presentation/Design Patterns.pptx
+++ b/presentation/Design Patterns.pptx
@@ -10300,7 +10300,7 @@
                 </a:solidFill>
                 <a:latin typeface="Arial"/>
               </a:rPr>
-              <a:t xml:space="preserve">Logistics directly constructs trucks; sea delivery forces edits.</a:t>
+              <a:t xml:space="preserve">Logistics constructs concrete transports; each new kind forces edits.</a:t>
             </a:r>
             <a:endParaRPr sz="1700"/>
           </a:p>
@@ -10869,7 +10869,7 @@
         <p:spPr>
           <a:xfrm>
             <a:off x="482600" y="6769100"/>
-            <a:ext cx="8255000" cy="863600"/>
+            <a:ext cx="8255000" cy="1130300"/>
           </a:xfrm>
           <a:prstGeom prst="rect">
             <a:avLst/>
@@ -10912,6 +10912,23 @@
                 </a:solidFill>
                 <a:latin typeface="Courier New"/>
               </a:rPr>
+              <a:t xml:space="preserve">ship = new Ship()</a:t>
+            </a:r>
+            <a:endParaRPr sz="1600"/>
+          </a:p>
+          <a:p>
+            <a:pPr>
+              <a:lnSpc>
+                <a:spcPts val="2100"/>
+              </a:lnSpc>
+            </a:pPr>
+            <a:r>
+              <a:rPr lang="en-US" sz="1600">
+                <a:solidFill>
+                  <a:srgbClr val="18356F"/>
+                </a:solidFill>
+                <a:latin typeface="Courier New"/>
+              </a:rPr>
               <a:t xml:space="preserve">truck.deliver()</a:t>
             </a:r>
             <a:endParaRPr sz="1600"/>
@@ -10929,7 +10946,7 @@
                 </a:solidFill>
                 <a:latin typeface="Courier New"/>
               </a:rPr>
-              <a:t xml:space="preserve">// sea support needs another branch</a:t>
+              <a:t xml:space="preserve">// every new kind edits Logistics</a:t>
             </a:r>
             <a:endParaRPr sz="1600"/>
           </a:p>
